--- a/dist/초4/수학/수와연산/초4_수학_수와연산_07_소수두자리수와세자리수_학생용.pptx
+++ b/dist/초4/수학/수와연산/초4_수학_수와연산_07_소수두자리수와세자리수_학생용.pptx
@@ -119,13 +119,13 @@
   <p:extLst>
     <p:ext uri="{521415D9-36F7-43E2-AB2F-B90AF26B5E84}">
       <p14:sectionLst xmlns:p14="http://schemas.microsoft.com/office/powerpoint/2010/main">
-        <p14:section name="도입" id="{6e90fb49-68b0-301b-cc8c-972dc09ed529}">
+        <p14:section name="도입" id="{8c1a57f1-77ec-632f-f7e8-a7c3141cafff}">
           <p14:sldIdLst>
             <p14:sldId id="256"/>
             <p14:sldId id="257"/>
           </p14:sldIdLst>
         </p14:section>
-        <p14:section name="개념" id="{95eb807b-3f1c-d8c2-523c-df2f94f00ca1}">
+        <p14:section name="개념" id="{5259bcaf-b53d-4e82-44a0-3784c2f961e6}">
           <p14:sldIdLst>
             <p14:sldId id="258"/>
             <p14:sldId id="259"/>
@@ -134,30 +134,30 @@
             <p14:sldId id="263"/>
           </p14:sldIdLst>
         </p14:section>
-        <p14:section name="연습" id="{4d500eea-3305-1f88-512c-a7667e74650a}">
+        <p14:section name="연습" id="{dc6be036-77bb-f721-f953-a49c99965e33}">
           <p14:sldIdLst>
             <p14:sldId id="261"/>
             <p14:sldId id="264"/>
           </p14:sldIdLst>
         </p14:section>
-        <p14:section name="개념" id="{c885ff68-2820-ffa3-ef89-b11203b2cca0}">
+        <p14:section name="개념" id="{bb762446-b3ac-8288-aedd-f1de50016505}">
           <p14:sldIdLst/>
         </p14:section>
-        <p14:section name="연습" id="{7f93ea4f-c8b4-80e1-5abe-7118d2b2cf5a}">
+        <p14:section name="연습" id="{1cd36870-1c02-8e5f-fea1-05717fae200a}">
           <p14:sldIdLst/>
         </p14:section>
-        <p14:section name="확인" id="{4f211d05-832a-58fc-53d9-8d363224915f}">
+        <p14:section name="확인" id="{23c2f2f9-3293-df88-2316-05674e2d1d96}">
           <p14:sldIdLst>
             <p14:sldId id="265"/>
             <p14:sldId id="266"/>
           </p14:sldIdLst>
         </p14:section>
-        <p14:section name="정리" id="{8c17caf4-5129-df6d-6848-cdcbf36e8e06}">
+        <p14:section name="정리" id="{ed84148a-4646-d40e-1be4-6299f0e7d5d2}">
           <p14:sldIdLst>
             <p14:sldId id="267"/>
           </p14:sldIdLst>
         </p14:section>
-        <p14:section name="보충" id="{a7ce29f0-598e-6ca1-a803-c88544b8c85f}">
+        <p14:section name="보충" id="{82600ef5-c6b0-8900-bb0c-69ee063068fb}">
           <p14:sldIdLst>
             <p14:sldId id="268"/>
           </p14:sldIdLst>
@@ -13979,7 +13979,7 @@
               <a:buNone/>
             </a:pPr>
             <a:r>
-              <a:rPr lang="ko-KR" altLang="en-US" sz="3000" b="1" dirty="0">
+              <a:rPr lang="en-US" altLang="ko-KR" sz="3000" b="1" dirty="0">
                 <a:solidFill>
                   <a:srgbClr val="1F2937"/>
                 </a:solidFill>
@@ -21817,7 +21817,7 @@
               <a:buNone/>
             </a:pPr>
             <a:r>
-              <a:rPr lang="ko-KR" altLang="en-US" sz="3000" b="1" dirty="0">
+              <a:rPr lang="en-US" altLang="ko-KR" sz="3000" b="1" dirty="0">
                 <a:solidFill>
                   <a:srgbClr val="1F2937"/>
                 </a:solidFill>
